--- a/Project-1 ppt.pptx
+++ b/Project-1 ppt.pptx
@@ -154,14 +154,6 @@
     </p:ext>
   </p:extLst>
 </p:presentation>
-</file>
-
-<file path=ppt/revisionInfo.xml><?xml version="1.0" encoding="utf-8"?>
-<p1510:revInfo xmlns:a="http://schemas.openxmlformats.org/drawingml/2006/main" xmlns:r="http://schemas.openxmlformats.org/officeDocument/2006/relationships" xmlns:p1510="http://schemas.microsoft.com/office/powerpoint/2015/10/main">
-  <p1510:revLst>
-    <p1510:client id="{ED67BBC5-90FB-0B4C-ED85-F72C7BA7CE4A}" v="1" dt="2022-06-06T12:10:26.221"/>
-  </p1510:revLst>
-</p1510:revInfo>
 </file>
 
 <file path=ppt/diagrams/colors1.xml><?xml version="1.0" encoding="utf-8"?>
@@ -1103,7 +1095,7 @@
       <dgm:spPr/>
     </dgm:pt>
     <dgm:pt modelId="{2719B0D9-67AA-4FBD-A2A3-26D87A40E1F7}" type="pres">
-      <dgm:prSet presAssocID="{0A807C15-10F6-4C8D-97BA-E52C3FB89F1E}" presName="imageRepeatNode" presStyleLbl="alignNode1" presStyleIdx="2" presStyleCnt="5" custScaleX="1896488" custScaleY="1575598" custLinFactX="-531292" custLinFactNeighborX="-600000" custLinFactNeighborY="35888"/>
+      <dgm:prSet presAssocID="{0A807C15-10F6-4C8D-97BA-E52C3FB89F1E}" presName="imageRepeatNode" presStyleLbl="alignNode1" presStyleIdx="2" presStyleCnt="5" custScaleX="1896488" custScaleY="1575598" custLinFactX="-400000" custLinFactNeighborX="-432067" custLinFactNeighborY="3866"/>
       <dgm:spPr/>
     </dgm:pt>
     <dgm:pt modelId="{E9D3A17A-9776-4F6B-9589-4C44485869D9}" type="pres">
@@ -1502,7 +1494,7 @@
       </dsp:nvSpPr>
       <dsp:spPr>
         <a:xfrm>
-          <a:off x="0" y="0"/>
+          <a:off x="7953" y="0"/>
           <a:ext cx="6263869" cy="4976768"/>
         </a:xfrm>
         <a:prstGeom prst="rect">
@@ -4274,7 +4266,7 @@
           <a:p>
             <a:fld id="{EF1077DB-935E-4A0A-947A-D283B9F9F452}" type="datetimeFigureOut">
               <a:rPr lang="en-US" smtClean="0"/>
-              <a:t>3/22/2026</a:t>
+              <a:t>3/26/2026</a:t>
             </a:fld>
             <a:endParaRPr lang="en-US" dirty="0"/>
           </a:p>
@@ -4451,7 +4443,7 @@
           <a:p>
             <a:fld id="{2D9EC30E-1A71-4188-9BE7-E2A64929A436}" type="datetimeFigureOut">
               <a:rPr lang="en-US" noProof="0" smtClean="0"/>
-              <a:t>3/22/2026</a:t>
+              <a:t>3/26/2026</a:t>
             </a:fld>
             <a:endParaRPr lang="en-US" noProof="0" dirty="0"/>
           </a:p>
@@ -5548,7 +5540,7 @@
             <a:fld id="{B61BEF0D-F0BB-DE4B-95CE-6DB70DBA9567}" type="datetimeFigureOut">
               <a:rPr lang="en-US" smtClean="0"/>
               <a:pPr/>
-              <a:t>3/22/2026</a:t>
+              <a:t>3/26/2026</a:t>
             </a:fld>
             <a:endParaRPr lang="en-US" dirty="0"/>
           </a:p>
@@ -5802,7 +5794,7 @@
             <a:fld id="{B61BEF0D-F0BB-DE4B-95CE-6DB70DBA9567}" type="datetimeFigureOut">
               <a:rPr lang="en-US" smtClean="0"/>
               <a:pPr/>
-              <a:t>3/22/2026</a:t>
+              <a:t>3/26/2026</a:t>
             </a:fld>
             <a:endParaRPr lang="en-US" dirty="0"/>
           </a:p>
@@ -6119,7 +6111,7 @@
             <a:fld id="{B61BEF0D-F0BB-DE4B-95CE-6DB70DBA9567}" type="datetimeFigureOut">
               <a:rPr lang="en-US" smtClean="0"/>
               <a:pPr/>
-              <a:t>3/22/2026</a:t>
+              <a:t>3/26/2026</a:t>
             </a:fld>
             <a:endParaRPr lang="en-US" dirty="0"/>
           </a:p>
@@ -6455,7 +6447,7 @@
             <a:fld id="{B61BEF0D-F0BB-DE4B-95CE-6DB70DBA9567}" type="datetimeFigureOut">
               <a:rPr lang="en-US" smtClean="0"/>
               <a:pPr/>
-              <a:t>3/22/2026</a:t>
+              <a:t>3/26/2026</a:t>
             </a:fld>
             <a:endParaRPr lang="en-US" dirty="0"/>
           </a:p>
@@ -6772,7 +6764,7 @@
             <a:fld id="{B61BEF0D-F0BB-DE4B-95CE-6DB70DBA9567}" type="datetimeFigureOut">
               <a:rPr lang="en-US" smtClean="0"/>
               <a:pPr/>
-              <a:t>3/22/2026</a:t>
+              <a:t>3/26/2026</a:t>
             </a:fld>
             <a:endParaRPr lang="en-US" dirty="0"/>
           </a:p>
@@ -7168,7 +7160,7 @@
             <a:fld id="{B61BEF0D-F0BB-DE4B-95CE-6DB70DBA9567}" type="datetimeFigureOut">
               <a:rPr lang="en-US" smtClean="0"/>
               <a:pPr/>
-              <a:t>3/22/2026</a:t>
+              <a:t>3/26/2026</a:t>
             </a:fld>
             <a:endParaRPr lang="en-US" dirty="0"/>
           </a:p>
@@ -7340,7 +7332,7 @@
           <a:p>
             <a:fld id="{55C6B4A9-1611-4792-9094-5F34BCA07E0B}" type="datetimeFigureOut">
               <a:rPr lang="en-US" smtClean="0"/>
-              <a:t>3/22/2026</a:t>
+              <a:t>3/26/2026</a:t>
             </a:fld>
             <a:endParaRPr lang="en-US" dirty="0"/>
           </a:p>
@@ -7522,7 +7514,7 @@
             <a:fld id="{B61BEF0D-F0BB-DE4B-95CE-6DB70DBA9567}" type="datetimeFigureOut">
               <a:rPr lang="en-US" smtClean="0"/>
               <a:pPr/>
-              <a:t>3/22/2026</a:t>
+              <a:t>3/26/2026</a:t>
             </a:fld>
             <a:endParaRPr lang="en-US" dirty="0"/>
           </a:p>
@@ -9251,7 +9243,7 @@
             <a:fld id="{B61BEF0D-F0BB-DE4B-95CE-6DB70DBA9567}" type="datetimeFigureOut">
               <a:rPr lang="en-US" smtClean="0"/>
               <a:pPr/>
-              <a:t>3/22/2026</a:t>
+              <a:t>3/26/2026</a:t>
             </a:fld>
             <a:endParaRPr lang="en-US" dirty="0"/>
           </a:p>
@@ -10986,7 +10978,7 @@
             <a:fld id="{B61BEF0D-F0BB-DE4B-95CE-6DB70DBA9567}" type="datetimeFigureOut">
               <a:rPr lang="en-US" smtClean="0"/>
               <a:pPr/>
-              <a:t>3/22/2026</a:t>
+              <a:t>3/26/2026</a:t>
             </a:fld>
             <a:endParaRPr lang="en-US" dirty="0"/>
           </a:p>
@@ -11220,7 +11212,7 @@
           <a:p>
             <a:fld id="{EB712588-04B1-427B-82EE-E8DB90309F08}" type="datetimeFigureOut">
               <a:rPr lang="en-US" smtClean="0"/>
-              <a:t>3/22/2026</a:t>
+              <a:t>3/26/2026</a:t>
             </a:fld>
             <a:endParaRPr lang="en-US" dirty="0"/>
           </a:p>
@@ -11596,7 +11588,7 @@
             <a:fld id="{B61BEF0D-F0BB-DE4B-95CE-6DB70DBA9567}" type="datetimeFigureOut">
               <a:rPr lang="en-US" smtClean="0"/>
               <a:pPr/>
-              <a:t>3/22/2026</a:t>
+              <a:t>3/26/2026</a:t>
             </a:fld>
             <a:endParaRPr lang="en-US" dirty="0"/>
           </a:p>
@@ -11722,7 +11714,7 @@
             <a:fld id="{B61BEF0D-F0BB-DE4B-95CE-6DB70DBA9567}" type="datetimeFigureOut">
               <a:rPr lang="en-US" smtClean="0"/>
               <a:pPr/>
-              <a:t>3/22/2026</a:t>
+              <a:t>3/26/2026</a:t>
             </a:fld>
             <a:endParaRPr lang="en-US" dirty="0"/>
           </a:p>
@@ -11820,7 +11812,7 @@
             <a:fld id="{B61BEF0D-F0BB-DE4B-95CE-6DB70DBA9567}" type="datetimeFigureOut">
               <a:rPr lang="en-US" smtClean="0"/>
               <a:pPr/>
-              <a:t>3/22/2026</a:t>
+              <a:t>3/26/2026</a:t>
             </a:fld>
             <a:endParaRPr lang="en-US" dirty="0"/>
           </a:p>
@@ -12077,7 +12069,7 @@
           <a:p>
             <a:fld id="{42A54C80-263E-416B-A8E0-580EDEADCBDC}" type="datetimeFigureOut">
               <a:rPr lang="en-US" smtClean="0"/>
-              <a:t>3/22/2026</a:t>
+              <a:t>3/26/2026</a:t>
             </a:fld>
             <a:endParaRPr lang="en-US" dirty="0"/>
           </a:p>
@@ -12385,7 +12377,7 @@
             <a:fld id="{B61BEF0D-F0BB-DE4B-95CE-6DB70DBA9567}" type="datetimeFigureOut">
               <a:rPr lang="en-US" smtClean="0"/>
               <a:pPr/>
-              <a:t>3/22/2026</a:t>
+              <a:t>3/26/2026</a:t>
             </a:fld>
             <a:endParaRPr lang="en-US" dirty="0"/>
           </a:p>
@@ -13089,7 +13081,7 @@
             <a:fld id="{B61BEF0D-F0BB-DE4B-95CE-6DB70DBA9567}" type="datetimeFigureOut">
               <a:rPr lang="en-US" smtClean="0"/>
               <a:pPr/>
-              <a:t>3/22/2026</a:t>
+              <a:t>3/26/2026</a:t>
             </a:fld>
             <a:endParaRPr lang="en-US" dirty="0"/>
           </a:p>
@@ -13300,7 +13292,7 @@
                 </a:solidFill>
               </a:rPr>
               <a:pPr/>
-              <a:t>3/22/2026</a:t>
+              <a:t>3/26/2026</a:t>
             </a:fld>
             <a:endParaRPr lang="en-US" sz="1100" dirty="0">
               <a:solidFill>
@@ -15204,6 +15196,41 @@
                 <a:schemeClr val="tx1"/>
               </a:solidFill>
             </a:endParaRPr>
+          </a:p>
+        </p:txBody>
+      </p:sp>
+      <p:sp>
+        <p:nvSpPr>
+          <p:cNvPr id="3" name="TextBox 2">
+            <a:extLst>
+              <a:ext uri="{FF2B5EF4-FFF2-40B4-BE49-F238E27FC236}">
+                <a16:creationId xmlns:a16="http://schemas.microsoft.com/office/drawing/2014/main" id="{0A0F5A6B-32A0-4291-8E89-EC74B153FD83}"/>
+              </a:ext>
+            </a:extLst>
+          </p:cNvPr>
+          <p:cNvSpPr txBox="1"/>
+          <p:nvPr/>
+        </p:nvSpPr>
+        <p:spPr>
+          <a:xfrm>
+            <a:off x="5677231" y="4491596"/>
+            <a:ext cx="4546822" cy="369332"/>
+          </a:xfrm>
+          <a:prstGeom prst="rect">
+            <a:avLst/>
+          </a:prstGeom>
+          <a:noFill/>
+        </p:spPr>
+        <p:txBody>
+          <a:bodyPr wrap="none" rtlCol="0">
+            <a:spAutoFit/>
+          </a:bodyPr>
+          <a:lstStyle/>
+          <a:p>
+            <a:r>
+              <a:rPr lang="en-IN" dirty="0"/>
+              <a:t>College Name: Pallavi Engineering College</a:t>
+            </a:r>
           </a:p>
         </p:txBody>
       </p:sp>
@@ -20636,7 +20663,7 @@
           <p:nvPr>
             <p:extLst>
               <p:ext uri="{D42A27DB-BD31-4B8C-83A1-F6EECF244321}">
-                <p14:modId xmlns:p14="http://schemas.microsoft.com/office/powerpoint/2010/main" val="2029649579"/>
+                <p14:modId xmlns:p14="http://schemas.microsoft.com/office/powerpoint/2010/main" val="2487327889"/>
               </p:ext>
             </p:extLst>
           </p:nvPr>
@@ -21892,6 +21919,44 @@
               </a:rPr>
               <a:t>GitHub link</a:t>
             </a:r>
+          </a:p>
+        </p:txBody>
+      </p:sp>
+      <p:sp>
+        <p:nvSpPr>
+          <p:cNvPr id="6" name="TextBox 5">
+            <a:extLst>
+              <a:ext uri="{FF2B5EF4-FFF2-40B4-BE49-F238E27FC236}">
+                <a16:creationId xmlns:a16="http://schemas.microsoft.com/office/drawing/2014/main" id="{2D4D74D1-A4AF-6D2E-EDC4-01A424C8FFBE}"/>
+              </a:ext>
+            </a:extLst>
+          </p:cNvPr>
+          <p:cNvSpPr txBox="1"/>
+          <p:nvPr/>
+        </p:nvSpPr>
+        <p:spPr>
+          <a:xfrm>
+            <a:off x="1494845" y="2138901"/>
+            <a:ext cx="7005829" cy="369332"/>
+          </a:xfrm>
+          <a:prstGeom prst="rect">
+            <a:avLst/>
+          </a:prstGeom>
+          <a:noFill/>
+        </p:spPr>
+        <p:txBody>
+          <a:bodyPr wrap="none" rtlCol="0">
+            <a:spAutoFit/>
+          </a:bodyPr>
+          <a:lstStyle/>
+          <a:p>
+            <a:r>
+              <a:rPr lang="en-IN" dirty="0">
+                <a:hlinkClick r:id="rId2"/>
+              </a:rPr>
+              <a:t>https://github.com/00abhiram/Network-Port-Scanner/tree/main</a:t>
+            </a:r>
+            <a:endParaRPr lang="en-IN" dirty="0"/>
           </a:p>
         </p:txBody>
       </p:sp>
